--- a/clientes/flavia-muccelin/O-Que-Torna-Essas-Marcas-Unicas-Forma-e-My-Home.pptx
+++ b/clientes/flavia-muccelin/O-Que-Torna-Essas-Marcas-Unicas-Forma-e-My-Home.pptx
@@ -8096,7 +8096,7 @@
         </p:nvSpPr>
         <p:spPr>
           <a:xfrm>
-            <a:off x="2011680" y="1689354"/>
+            <a:off x="2011680" y="1723644"/>
             <a:ext cx="14264640" cy="1005078"/>
           </a:xfrm>
           <a:prstGeom prst="rect">
@@ -8144,7 +8144,7 @@
         </p:nvSpPr>
         <p:spPr>
           <a:xfrm>
-            <a:off x="2011680" y="2602992"/>
+            <a:off x="2011680" y="2637282"/>
             <a:ext cx="14264640" cy="10973"/>
           </a:xfrm>
           <a:prstGeom prst="rect">
@@ -8188,7 +8188,7 @@
         </p:nvSpPr>
         <p:spPr>
           <a:xfrm>
-            <a:off x="2011680" y="3198114"/>
+            <a:off x="2011680" y="3005328"/>
             <a:ext cx="4754880" cy="256032"/>
           </a:xfrm>
           <a:prstGeom prst="rect">
@@ -8227,7 +8227,7 @@
         </p:nvSpPr>
         <p:spPr>
           <a:xfrm>
-            <a:off x="7132320" y="3198114"/>
+            <a:off x="7132320" y="3005328"/>
             <a:ext cx="9144000" cy="256032"/>
           </a:xfrm>
           <a:prstGeom prst="rect">
@@ -8266,7 +8266,7 @@
         </p:nvSpPr>
         <p:spPr>
           <a:xfrm>
-            <a:off x="2011680" y="3710178"/>
+            <a:off x="2011680" y="3517392"/>
             <a:ext cx="14264640" cy="10973"/>
           </a:xfrm>
           <a:prstGeom prst="rect">
@@ -8310,7 +8310,7 @@
         </p:nvSpPr>
         <p:spPr>
           <a:xfrm>
-            <a:off x="2011680" y="3984498"/>
+            <a:off x="2011680" y="3791712"/>
             <a:ext cx="4754880" cy="685800"/>
           </a:xfrm>
           <a:prstGeom prst="rect">
@@ -8349,7 +8349,7 @@
         </p:nvSpPr>
         <p:spPr>
           <a:xfrm>
-            <a:off x="7132320" y="3911346"/>
+            <a:off x="7132320" y="3718560"/>
             <a:ext cx="9144000" cy="795528"/>
           </a:xfrm>
           <a:prstGeom prst="rect">
@@ -8365,11 +8365,11 @@
           <a:p>
             <a:pPr algn="l">
               <a:lnSpc>
-                <a:spcPts val="2379"/>
-              </a:lnSpc>
-            </a:pPr>
-            <a:r>
-              <a:rPr sz="1700" i="0" b="0">
+                <a:spcPts val="3500"/>
+              </a:lnSpc>
+            </a:pPr>
+            <a:r>
+              <a:rPr sz="2500" i="0" b="0">
                 <a:solidFill>
                   <a:srgbClr val="1C1C1A"/>
                 </a:solidFill>
@@ -8388,7 +8388,7 @@
         </p:nvSpPr>
         <p:spPr>
           <a:xfrm>
-            <a:off x="2011680" y="4780026"/>
+            <a:off x="2011680" y="4587240"/>
             <a:ext cx="14264640" cy="10973"/>
           </a:xfrm>
           <a:prstGeom prst="rect">
@@ -8432,7 +8432,7 @@
         </p:nvSpPr>
         <p:spPr>
           <a:xfrm>
-            <a:off x="2011680" y="5054346"/>
+            <a:off x="2011680" y="4861560"/>
             <a:ext cx="4754880" cy="388620"/>
           </a:xfrm>
           <a:prstGeom prst="rect">
@@ -8471,8 +8471,8 @@
         </p:nvSpPr>
         <p:spPr>
           <a:xfrm>
-            <a:off x="7132320" y="4981194"/>
-            <a:ext cx="9144000" cy="498348"/>
+            <a:off x="7132320" y="4788408"/>
+            <a:ext cx="9144000" cy="517652"/>
           </a:xfrm>
           <a:prstGeom prst="rect">
             <a:avLst/>
@@ -8487,11 +8487,11 @@
           <a:p>
             <a:pPr algn="l">
               <a:lnSpc>
-                <a:spcPts val="2379"/>
-              </a:lnSpc>
-            </a:pPr>
-            <a:r>
-              <a:rPr sz="1700" i="0" b="0">
+                <a:spcPts val="3500"/>
+              </a:lnSpc>
+            </a:pPr>
+            <a:r>
+              <a:rPr sz="2500" i="0" b="0">
                 <a:solidFill>
                   <a:srgbClr val="1C1C1A"/>
                 </a:solidFill>
@@ -8510,7 +8510,7 @@
         </p:nvSpPr>
         <p:spPr>
           <a:xfrm>
-            <a:off x="2011680" y="5552694"/>
+            <a:off x="2011680" y="5379212"/>
             <a:ext cx="14264640" cy="10973"/>
           </a:xfrm>
           <a:prstGeom prst="rect">
@@ -8554,7 +8554,7 @@
         </p:nvSpPr>
         <p:spPr>
           <a:xfrm>
-            <a:off x="2011680" y="5827014"/>
+            <a:off x="2011680" y="5653532"/>
             <a:ext cx="4754880" cy="685800"/>
           </a:xfrm>
           <a:prstGeom prst="rect">
@@ -8593,7 +8593,7 @@
         </p:nvSpPr>
         <p:spPr>
           <a:xfrm>
-            <a:off x="7132320" y="5753862"/>
+            <a:off x="7132320" y="5580380"/>
             <a:ext cx="9144000" cy="795528"/>
           </a:xfrm>
           <a:prstGeom prst="rect">
@@ -8609,11 +8609,11 @@
           <a:p>
             <a:pPr algn="l">
               <a:lnSpc>
-                <a:spcPts val="2379"/>
-              </a:lnSpc>
-            </a:pPr>
-            <a:r>
-              <a:rPr sz="1700" i="0" b="0">
+                <a:spcPts val="3500"/>
+              </a:lnSpc>
+            </a:pPr>
+            <a:r>
+              <a:rPr sz="2500" i="0" b="0">
                 <a:solidFill>
                   <a:srgbClr val="1C1C1A"/>
                 </a:solidFill>
@@ -8632,7 +8632,7 @@
         </p:nvSpPr>
         <p:spPr>
           <a:xfrm>
-            <a:off x="2011680" y="6622542"/>
+            <a:off x="2011680" y="6449060"/>
             <a:ext cx="14264640" cy="10973"/>
           </a:xfrm>
           <a:prstGeom prst="rect">
@@ -8676,7 +8676,7 @@
         </p:nvSpPr>
         <p:spPr>
           <a:xfrm>
-            <a:off x="2011680" y="6896862"/>
+            <a:off x="2011680" y="6723380"/>
             <a:ext cx="4754880" cy="388620"/>
           </a:xfrm>
           <a:prstGeom prst="rect">
@@ -8715,8 +8715,8 @@
         </p:nvSpPr>
         <p:spPr>
           <a:xfrm>
-            <a:off x="7132320" y="6823710"/>
-            <a:ext cx="9144000" cy="498348"/>
+            <a:off x="7132320" y="6650228"/>
+            <a:ext cx="9144000" cy="517652"/>
           </a:xfrm>
           <a:prstGeom prst="rect">
             <a:avLst/>
@@ -8731,11 +8731,11 @@
           <a:p>
             <a:pPr algn="l">
               <a:lnSpc>
-                <a:spcPts val="2379"/>
-              </a:lnSpc>
-            </a:pPr>
-            <a:r>
-              <a:rPr sz="1700" i="0" b="0">
+                <a:spcPts val="3500"/>
+              </a:lnSpc>
+            </a:pPr>
+            <a:r>
+              <a:rPr sz="2500" i="0" b="0">
                 <a:solidFill>
                   <a:srgbClr val="1C1C1A"/>
                 </a:solidFill>
@@ -8754,7 +8754,7 @@
         </p:nvSpPr>
         <p:spPr>
           <a:xfrm>
-            <a:off x="2011680" y="7395210"/>
+            <a:off x="2011680" y="7241032"/>
             <a:ext cx="14264640" cy="10973"/>
           </a:xfrm>
           <a:prstGeom prst="rect">
@@ -8798,7 +8798,7 @@
         </p:nvSpPr>
         <p:spPr>
           <a:xfrm>
-            <a:off x="2011680" y="7669530"/>
+            <a:off x="2011680" y="7515352"/>
             <a:ext cx="4754880" cy="388620"/>
           </a:xfrm>
           <a:prstGeom prst="rect">
@@ -8837,8 +8837,8 @@
         </p:nvSpPr>
         <p:spPr>
           <a:xfrm>
-            <a:off x="7132320" y="7596378"/>
-            <a:ext cx="9144000" cy="498348"/>
+            <a:off x="7132320" y="7442200"/>
+            <a:ext cx="9144000" cy="517652"/>
           </a:xfrm>
           <a:prstGeom prst="rect">
             <a:avLst/>
@@ -8853,11 +8853,11 @@
           <a:p>
             <a:pPr algn="l">
               <a:lnSpc>
-                <a:spcPts val="2379"/>
-              </a:lnSpc>
-            </a:pPr>
-            <a:r>
-              <a:rPr sz="1700" i="0" b="0">
+                <a:spcPts val="3500"/>
+              </a:lnSpc>
+            </a:pPr>
+            <a:r>
+              <a:rPr sz="2500" i="0" b="0">
                 <a:solidFill>
                   <a:srgbClr val="1C1C1A"/>
                 </a:solidFill>
@@ -8876,7 +8876,7 @@
         </p:nvSpPr>
         <p:spPr>
           <a:xfrm>
-            <a:off x="2011680" y="7998714"/>
+            <a:off x="2011680" y="8033004"/>
             <a:ext cx="1188720" cy="27432"/>
           </a:xfrm>
           <a:prstGeom prst="rect">
@@ -18126,7 +18126,7 @@
         </p:nvSpPr>
         <p:spPr>
           <a:xfrm>
-            <a:off x="2011680" y="1796034"/>
+            <a:off x="2011680" y="1723644"/>
             <a:ext cx="14264640" cy="1005078"/>
           </a:xfrm>
           <a:prstGeom prst="rect">
@@ -18183,7 +18183,7 @@
         </p:nvSpPr>
         <p:spPr>
           <a:xfrm>
-            <a:off x="2011680" y="3440430"/>
+            <a:off x="2011680" y="3368040"/>
             <a:ext cx="14264640" cy="10973"/>
           </a:xfrm>
           <a:prstGeom prst="rect">
@@ -18227,7 +18227,7 @@
         </p:nvSpPr>
         <p:spPr>
           <a:xfrm>
-            <a:off x="2011680" y="3787902"/>
+            <a:off x="2011680" y="3715512"/>
             <a:ext cx="14264640" cy="10973"/>
           </a:xfrm>
           <a:prstGeom prst="rect">
@@ -18271,7 +18271,7 @@
         </p:nvSpPr>
         <p:spPr>
           <a:xfrm>
-            <a:off x="2011680" y="4062222"/>
+            <a:off x="2011680" y="3989832"/>
             <a:ext cx="4754880" cy="388620"/>
           </a:xfrm>
           <a:prstGeom prst="rect">
@@ -18310,8 +18310,8 @@
         </p:nvSpPr>
         <p:spPr>
           <a:xfrm>
-            <a:off x="7132320" y="3989070"/>
-            <a:ext cx="9144000" cy="1116584"/>
+            <a:off x="7132320" y="3916680"/>
+            <a:ext cx="9144000" cy="1017016"/>
           </a:xfrm>
           <a:prstGeom prst="rect">
             <a:avLst/>
@@ -18326,11 +18326,11 @@
           <a:p>
             <a:pPr algn="l">
               <a:lnSpc>
-                <a:spcPts val="2379"/>
-              </a:lnSpc>
-            </a:pPr>
-            <a:r>
-              <a:rPr sz="1700" i="0" b="0">
+                <a:spcPts val="3500"/>
+              </a:lnSpc>
+            </a:pPr>
+            <a:r>
+              <a:rPr sz="2500" i="0" b="0">
                 <a:solidFill>
                   <a:srgbClr val="1C1C1A"/>
                 </a:solidFill>
@@ -18349,7 +18349,7 @@
         </p:nvSpPr>
         <p:spPr>
           <a:xfrm>
-            <a:off x="2011680" y="5178806"/>
+            <a:off x="2011680" y="5006848"/>
             <a:ext cx="14264640" cy="10973"/>
           </a:xfrm>
           <a:prstGeom prst="rect">
@@ -18393,7 +18393,7 @@
         </p:nvSpPr>
         <p:spPr>
           <a:xfrm>
-            <a:off x="2011680" y="5453126"/>
+            <a:off x="2011680" y="5281168"/>
             <a:ext cx="4754880" cy="388620"/>
           </a:xfrm>
           <a:prstGeom prst="rect">
@@ -18432,8 +18432,8 @@
         </p:nvSpPr>
         <p:spPr>
           <a:xfrm>
-            <a:off x="7132320" y="5379974"/>
-            <a:ext cx="9144000" cy="1116584"/>
+            <a:off x="7132320" y="5208016"/>
+            <a:ext cx="9144000" cy="1017016"/>
           </a:xfrm>
           <a:prstGeom prst="rect">
             <a:avLst/>
@@ -18448,11 +18448,11 @@
           <a:p>
             <a:pPr algn="l">
               <a:lnSpc>
-                <a:spcPts val="2379"/>
-              </a:lnSpc>
-            </a:pPr>
-            <a:r>
-              <a:rPr sz="1700" i="0" b="0">
+                <a:spcPts val="3500"/>
+              </a:lnSpc>
+            </a:pPr>
+            <a:r>
+              <a:rPr sz="2500" i="0" b="0">
                 <a:solidFill>
                   <a:srgbClr val="1C1C1A"/>
                 </a:solidFill>
@@ -18471,7 +18471,7 @@
         </p:nvSpPr>
         <p:spPr>
           <a:xfrm>
-            <a:off x="2011680" y="6569710"/>
+            <a:off x="2011680" y="6298184"/>
             <a:ext cx="14264640" cy="10973"/>
           </a:xfrm>
           <a:prstGeom prst="rect">
@@ -18515,7 +18515,7 @@
         </p:nvSpPr>
         <p:spPr>
           <a:xfrm>
-            <a:off x="2011680" y="6844030"/>
+            <a:off x="2011680" y="6572504"/>
             <a:ext cx="4754880" cy="388620"/>
           </a:xfrm>
           <a:prstGeom prst="rect">
@@ -18554,8 +18554,8 @@
         </p:nvSpPr>
         <p:spPr>
           <a:xfrm>
-            <a:off x="7132320" y="6770878"/>
-            <a:ext cx="9144000" cy="1116584"/>
+            <a:off x="7132320" y="6499352"/>
+            <a:ext cx="9144000" cy="1461516"/>
           </a:xfrm>
           <a:prstGeom prst="rect">
             <a:avLst/>
@@ -18570,11 +18570,11 @@
           <a:p>
             <a:pPr algn="l">
               <a:lnSpc>
-                <a:spcPts val="2379"/>
-              </a:lnSpc>
-            </a:pPr>
-            <a:r>
-              <a:rPr sz="1700" i="0" b="0">
+                <a:spcPts val="3500"/>
+              </a:lnSpc>
+            </a:pPr>
+            <a:r>
+              <a:rPr sz="2500" i="0" b="0">
                 <a:solidFill>
                   <a:srgbClr val="1C1C1A"/>
                 </a:solidFill>
@@ -18593,7 +18593,7 @@
         </p:nvSpPr>
         <p:spPr>
           <a:xfrm>
-            <a:off x="2011680" y="7960614"/>
+            <a:off x="2011680" y="8033004"/>
             <a:ext cx="1188720" cy="27432"/>
           </a:xfrm>
           <a:prstGeom prst="rect">
